--- a/HTML_CSS/PowerPointSlides/Chapter 3 slides.pptx
+++ b/HTML_CSS/PowerPointSlides/Chapter 3 slides.pptx
@@ -210,6 +210,14 @@
 </p:presentation>
 </file>
 
+<file path=ppt/revisionInfo.xml><?xml version="1.0" encoding="utf-8"?>
+<p1510:revInfo xmlns:a="http://schemas.openxmlformats.org/drawingml/2006/main" xmlns:r="http://schemas.openxmlformats.org/officeDocument/2006/relationships" xmlns:p1510="http://schemas.microsoft.com/office/powerpoint/2015/10/main">
+  <p1510:revLst>
+    <p1510:client id="{3FCAD6BC-A3A0-4D7B-8FF8-3DF38D86B5CB}" v="5" dt="2026-08-31T20:01:17.551"/>
+  </p1510:revLst>
+</p1510:revInfo>
+</file>
+
 <file path=ppt/notesMasters/notesMaster1.xml><?xml version="1.0" encoding="utf-8"?>
 <p:notesMaster xmlns:a="http://schemas.openxmlformats.org/drawingml/2006/main" xmlns:r="http://schemas.openxmlformats.org/officeDocument/2006/relationships" xmlns:p="http://schemas.openxmlformats.org/presentationml/2006/main">
   <p:cSld>
@@ -7505,7 +7513,7 @@
               </a14:hiddenLine>
             </a:ext>
             <a:ext uri="{FAA26D3D-D897-4be2-8F04-BA451C77F1D7}">
-              <ma14:placeholderFlag xmlns:ma14="http://schemas.microsoft.com/office/mac/drawingml/2011/main" xmlns="" val="1"/>
+              <ma14:placeholderFlag xmlns="" xmlns:ma14="http://schemas.microsoft.com/office/mac/drawingml/2011/main" val="1"/>
             </a:ext>
           </a:extLst>
         </p:spPr>
@@ -7569,7 +7577,7 @@
               </a14:hiddenLine>
             </a:ext>
             <a:ext uri="{FAA26D3D-D897-4be2-8F04-BA451C77F1D7}">
-              <ma14:placeholderFlag xmlns:ma14="http://schemas.microsoft.com/office/mac/drawingml/2011/main" xmlns="" val="1"/>
+              <ma14:placeholderFlag xmlns="" xmlns:ma14="http://schemas.microsoft.com/office/mac/drawingml/2011/main" val="1"/>
             </a:ext>
           </a:extLst>
         </p:spPr>
@@ -10764,7 +10772,7 @@
         </p:blipFill>
         <p:spPr>
           <a:xfrm>
-            <a:off x="704850" y="2474657"/>
+            <a:off x="704850" y="2286000"/>
             <a:ext cx="7734300" cy="2088261"/>
           </a:xfrm>
         </p:spPr>
